--- a/reports/01-executive-summary.pptx
+++ b/reports/01-executive-summary.pptx
@@ -107,7 +107,7 @@
   <p:extLst>
     <p:ext uri="{521415D9-36F7-43E2-AB2F-B90AF26B5E84}">
       <p14:sectionLst xmlns:p14="http://schemas.microsoft.com/office/powerpoint/2010/main">
-        <p14:section name="Executive summary" id="{017059cf-f57f-6f0c-2eb4-0da6a2d15f6d}">
+        <p14:section name="Executive summary" id="{a1791e66-52e8-599b-dd61-65241ba6981b}">
           <p14:sldIdLst>
             <p14:sldId id="256"/>
           </p14:sldIdLst>
